--- a/Major 3/pdf/RSA.pptx
+++ b/Major 3/pdf/RSA.pptx
@@ -270,7 +270,7 @@
           <a:p>
             <a:fld id="{92149A73-1F93-4CCD-B34C-3F77CE5F55D2}" type="datetimeFigureOut">
               <a:rPr lang="en-IN" smtClean="0"/>
-              <a:t>17-07-2026</a:t>
+              <a:t>18-07-2026</a:t>
             </a:fld>
             <a:endParaRPr lang="en-IN"/>
           </a:p>
@@ -470,7 +470,7 @@
           <a:p>
             <a:fld id="{92149A73-1F93-4CCD-B34C-3F77CE5F55D2}" type="datetimeFigureOut">
               <a:rPr lang="en-IN" smtClean="0"/>
-              <a:t>17-07-2026</a:t>
+              <a:t>18-07-2026</a:t>
             </a:fld>
             <a:endParaRPr lang="en-IN"/>
           </a:p>
@@ -680,7 +680,7 @@
           <a:p>
             <a:fld id="{92149A73-1F93-4CCD-B34C-3F77CE5F55D2}" type="datetimeFigureOut">
               <a:rPr lang="en-IN" smtClean="0"/>
-              <a:t>17-07-2026</a:t>
+              <a:t>18-07-2026</a:t>
             </a:fld>
             <a:endParaRPr lang="en-IN"/>
           </a:p>
@@ -880,7 +880,7 @@
           <a:p>
             <a:fld id="{92149A73-1F93-4CCD-B34C-3F77CE5F55D2}" type="datetimeFigureOut">
               <a:rPr lang="en-IN" smtClean="0"/>
-              <a:t>17-07-2026</a:t>
+              <a:t>18-07-2026</a:t>
             </a:fld>
             <a:endParaRPr lang="en-IN"/>
           </a:p>
@@ -1156,7 +1156,7 @@
           <a:p>
             <a:fld id="{92149A73-1F93-4CCD-B34C-3F77CE5F55D2}" type="datetimeFigureOut">
               <a:rPr lang="en-IN" smtClean="0"/>
-              <a:t>17-07-2026</a:t>
+              <a:t>18-07-2026</a:t>
             </a:fld>
             <a:endParaRPr lang="en-IN"/>
           </a:p>
@@ -1424,7 +1424,7 @@
           <a:p>
             <a:fld id="{92149A73-1F93-4CCD-B34C-3F77CE5F55D2}" type="datetimeFigureOut">
               <a:rPr lang="en-IN" smtClean="0"/>
-              <a:t>17-07-2026</a:t>
+              <a:t>18-07-2026</a:t>
             </a:fld>
             <a:endParaRPr lang="en-IN"/>
           </a:p>
@@ -1839,7 +1839,7 @@
           <a:p>
             <a:fld id="{92149A73-1F93-4CCD-B34C-3F77CE5F55D2}" type="datetimeFigureOut">
               <a:rPr lang="en-IN" smtClean="0"/>
-              <a:t>17-07-2026</a:t>
+              <a:t>18-07-2026</a:t>
             </a:fld>
             <a:endParaRPr lang="en-IN"/>
           </a:p>
@@ -1981,7 +1981,7 @@
           <a:p>
             <a:fld id="{92149A73-1F93-4CCD-B34C-3F77CE5F55D2}" type="datetimeFigureOut">
               <a:rPr lang="en-IN" smtClean="0"/>
-              <a:t>17-07-2026</a:t>
+              <a:t>18-07-2026</a:t>
             </a:fld>
             <a:endParaRPr lang="en-IN"/>
           </a:p>
@@ -2094,7 +2094,7 @@
           <a:p>
             <a:fld id="{92149A73-1F93-4CCD-B34C-3F77CE5F55D2}" type="datetimeFigureOut">
               <a:rPr lang="en-IN" smtClean="0"/>
-              <a:t>17-07-2026</a:t>
+              <a:t>18-07-2026</a:t>
             </a:fld>
             <a:endParaRPr lang="en-IN"/>
           </a:p>
@@ -2407,7 +2407,7 @@
           <a:p>
             <a:fld id="{92149A73-1F93-4CCD-B34C-3F77CE5F55D2}" type="datetimeFigureOut">
               <a:rPr lang="en-IN" smtClean="0"/>
-              <a:t>17-07-2026</a:t>
+              <a:t>18-07-2026</a:t>
             </a:fld>
             <a:endParaRPr lang="en-IN"/>
           </a:p>
@@ -2696,7 +2696,7 @@
           <a:p>
             <a:fld id="{92149A73-1F93-4CCD-B34C-3F77CE5F55D2}" type="datetimeFigureOut">
               <a:rPr lang="en-IN" smtClean="0"/>
-              <a:t>17-07-2026</a:t>
+              <a:t>18-07-2026</a:t>
             </a:fld>
             <a:endParaRPr lang="en-IN"/>
           </a:p>
@@ -2939,7 +2939,7 @@
           <a:p>
             <a:fld id="{92149A73-1F93-4CCD-B34C-3F77CE5F55D2}" type="datetimeFigureOut">
               <a:rPr lang="en-IN" smtClean="0"/>
-              <a:t>17-07-2026</a:t>
+              <a:t>18-07-2026</a:t>
             </a:fld>
             <a:endParaRPr lang="en-IN"/>
           </a:p>
@@ -3514,7 +3514,21 @@
                 <a:latin typeface="Times New Roman" panose="02020603050405020304" pitchFamily="18" charset="0"/>
                 <a:cs typeface="Times New Roman" panose="02020603050405020304" pitchFamily="18" charset="0"/>
               </a:rPr>
-              <a:t>Consider: p=61, q=53, message, P = m. Execute RSA.</a:t>
+              <a:t>Consider: p=61, q=53, message, P </a:t>
+            </a:r>
+            <a:r>
+              <a:rPr lang="en-IN" sz="2000">
+                <a:latin typeface="Times New Roman" panose="02020603050405020304" pitchFamily="18" charset="0"/>
+                <a:cs typeface="Times New Roman" panose="02020603050405020304" pitchFamily="18" charset="0"/>
+              </a:rPr>
+              <a:t>= A. </a:t>
+            </a:r>
+            <a:r>
+              <a:rPr lang="en-IN" sz="2000" dirty="0">
+                <a:latin typeface="Times New Roman" panose="02020603050405020304" pitchFamily="18" charset="0"/>
+                <a:cs typeface="Times New Roman" panose="02020603050405020304" pitchFamily="18" charset="0"/>
+              </a:rPr>
+              <a:t>Execute RSA.</a:t>
             </a:r>
           </a:p>
         </p:txBody>
